--- a/slide/themes/src/33_thesis.pptx
+++ b/slide/themes/src/33_thesis.pptx
@@ -4434,11 +4434,7 @@
           </a:bodyPr>
           <a:lstStyle>
             <a:lvl1pPr>
-              <a:defRPr b="1">
-                <a:latin typeface="Times New Roman"/>
-                <a:ea typeface="Times New Roman"/>
-                <a:cs typeface="Times New Roman"/>
-              </a:defRPr>
+              <a:defRPr b="1"/>
             </a:lvl1pPr>
           </a:lstStyle>
           <a:p>
@@ -4479,75 +4475,39 @@
           <a:lstStyle>
             <a:lvl1pPr>
               <a:buNone/>
-              <a:defRPr>
-                <a:latin typeface="Times New Roman"/>
-                <a:ea typeface="Times New Roman"/>
-                <a:cs typeface="Times New Roman"/>
-              </a:defRPr>
+              <a:defRPr/>
             </a:lvl1pPr>
             <a:lvl2pPr>
               <a:buNone/>
-              <a:defRPr>
-                <a:latin typeface="Times New Roman"/>
-                <a:ea typeface="Times New Roman"/>
-                <a:cs typeface="Times New Roman"/>
-              </a:defRPr>
+              <a:defRPr/>
             </a:lvl2pPr>
             <a:lvl3pPr>
               <a:buNone/>
-              <a:defRPr>
-                <a:latin typeface="Times New Roman"/>
-                <a:ea typeface="Times New Roman"/>
-                <a:cs typeface="Times New Roman"/>
-              </a:defRPr>
+              <a:defRPr/>
             </a:lvl3pPr>
             <a:lvl4pPr>
               <a:buNone/>
-              <a:defRPr>
-                <a:latin typeface="Times New Roman"/>
-                <a:ea typeface="Times New Roman"/>
-                <a:cs typeface="Times New Roman"/>
-              </a:defRPr>
+              <a:defRPr/>
             </a:lvl4pPr>
             <a:lvl5pPr>
               <a:buNone/>
-              <a:defRPr>
-                <a:latin typeface="Times New Roman"/>
-                <a:ea typeface="Times New Roman"/>
-                <a:cs typeface="Times New Roman"/>
-              </a:defRPr>
+              <a:defRPr/>
             </a:lvl5pPr>
             <a:lvl6pPr>
               <a:buNone/>
-              <a:defRPr>
-                <a:latin typeface="Times New Roman"/>
-                <a:ea typeface="Times New Roman"/>
-                <a:cs typeface="Times New Roman"/>
-              </a:defRPr>
+              <a:defRPr/>
             </a:lvl6pPr>
             <a:lvl7pPr>
               <a:buNone/>
-              <a:defRPr>
-                <a:latin typeface="Times New Roman"/>
-                <a:ea typeface="Times New Roman"/>
-                <a:cs typeface="Times New Roman"/>
-              </a:defRPr>
+              <a:defRPr/>
             </a:lvl7pPr>
             <a:lvl8pPr>
               <a:buNone/>
-              <a:defRPr>
-                <a:latin typeface="Times New Roman"/>
-                <a:ea typeface="Times New Roman"/>
-                <a:cs typeface="Times New Roman"/>
-              </a:defRPr>
+              <a:defRPr/>
             </a:lvl8pPr>
             <a:lvl9pPr>
               <a:buNone/>
-              <a:defRPr>
-                <a:latin typeface="Times New Roman"/>
-                <a:ea typeface="Times New Roman"/>
-                <a:cs typeface="Times New Roman"/>
-              </a:defRPr>
+              <a:defRPr/>
             </a:lvl9pPr>
           </a:lstStyle>
           <a:p>
@@ -5150,14 +5110,14 @@
     </a:clrScheme>
     <a:fontScheme name="Office Theme">
       <a:majorFont>
-        <a:latin typeface="Arial"/>
+        <a:latin typeface="Times New Roman"/>
         <a:ea typeface="SimSun"/>
-        <a:cs typeface="Arial"/>
+        <a:cs typeface="Times New Roman"/>
       </a:majorFont>
       <a:minorFont>
-        <a:latin typeface="Arial"/>
+        <a:latin typeface="Times New Roman"/>
         <a:ea typeface="SimSun"/>
-        <a:cs typeface="Arial"/>
+        <a:cs typeface="Times New Roman"/>
       </a:minorFont>
     </a:fontScheme>
     <a:fmtScheme name="Office Theme">
@@ -5345,14 +5305,14 @@
     </a:clrScheme>
     <a:fontScheme name="Arial">
       <a:majorFont>
-        <a:latin typeface="Arial"/>
-        <a:ea typeface="Arial"/>
-        <a:cs typeface="Arial"/>
+        <a:latin typeface="Times New Roman"/>
+        <a:ea typeface="SimSun"/>
+        <a:cs typeface="Times New Roman"/>
       </a:majorFont>
       <a:minorFont>
-        <a:latin typeface="Arial"/>
-        <a:ea typeface="Arial"/>
-        <a:cs typeface="Arial"/>
+        <a:latin typeface="Times New Roman"/>
+        <a:ea typeface="SimSun"/>
+        <a:cs typeface="Times New Roman"/>
       </a:minorFont>
     </a:fontScheme>
     <a:fmtScheme name="Office">

--- a/slide/themes/src/33_thesis.pptx
+++ b/slide/themes/src/33_thesis.pptx
@@ -536,10 +536,7 @@
             <a:pPr>
               <a:defRPr/>
             </a:pPr>
-            <a:endParaRPr lang="en-US">
-              <a:latin typeface="Arial"/>
-              <a:cs typeface="Arial"/>
-            </a:endParaRPr>
+            <a:endParaRPr lang="en-US"/>
           </a:p>
         </p:txBody>
       </p:sp>
